--- a/assets/powerpoints/module-n2-neige/A1-il-neige.pptx
+++ b/assets/powerpoints/module-n2-neige/A1-il-neige.pptx
@@ -12102,7 +12102,79 @@
                 </a:solidFill>
                 <a:latin typeface="Verdana"/>
               </a:rPr>
-              <a:t>Ce &lt;b&gt;il&lt;/b&gt; ne remplace personne : ni un homme, ni le ciel. C'est un mot obligatoire. On dit &lt;b&gt;il neige&lt;/b&gt;, &lt;b&gt;il pleut&lt;/b&gt;, &lt;b&gt;il vente&lt;/b&gt; — jamais « la neige neige ».</a:t>
+              <a:t>Ce </a:t>
+            </a:r>
+            <a:r>
+              <a:rPr sz="2000" b="1" i="0">
+                <a:solidFill>
+                  <a:srgbClr val="4B4F52"/>
+                </a:solidFill>
+                <a:latin typeface="Verdana"/>
+              </a:rPr>
+              <a:t>il</a:t>
+            </a:r>
+            <a:r>
+              <a:rPr sz="2000" b="0" i="0">
+                <a:solidFill>
+                  <a:srgbClr val="4B4F52"/>
+                </a:solidFill>
+                <a:latin typeface="Verdana"/>
+              </a:rPr>
+              <a:t> ne remplace personne : ni un homme, ni le ciel. C'est un mot obligatoire. On dit </a:t>
+            </a:r>
+            <a:r>
+              <a:rPr sz="2000" b="1" i="0">
+                <a:solidFill>
+                  <a:srgbClr val="4B4F52"/>
+                </a:solidFill>
+                <a:latin typeface="Verdana"/>
+              </a:rPr>
+              <a:t>il neige</a:t>
+            </a:r>
+            <a:r>
+              <a:rPr sz="2000" b="0" i="0">
+                <a:solidFill>
+                  <a:srgbClr val="4B4F52"/>
+                </a:solidFill>
+                <a:latin typeface="Verdana"/>
+              </a:rPr>
+              <a:t>, </a:t>
+            </a:r>
+            <a:r>
+              <a:rPr sz="2000" b="1" i="0">
+                <a:solidFill>
+                  <a:srgbClr val="4B4F52"/>
+                </a:solidFill>
+                <a:latin typeface="Verdana"/>
+              </a:rPr>
+              <a:t>il pleut</a:t>
+            </a:r>
+            <a:r>
+              <a:rPr sz="2000" b="0" i="0">
+                <a:solidFill>
+                  <a:srgbClr val="4B4F52"/>
+                </a:solidFill>
+                <a:latin typeface="Verdana"/>
+              </a:rPr>
+              <a:t>, </a:t>
+            </a:r>
+            <a:r>
+              <a:rPr sz="2000" b="1" i="0">
+                <a:solidFill>
+                  <a:srgbClr val="4B4F52"/>
+                </a:solidFill>
+                <a:latin typeface="Verdana"/>
+              </a:rPr>
+              <a:t>il vente</a:t>
+            </a:r>
+            <a:r>
+              <a:rPr sz="2000" b="0" i="0">
+                <a:solidFill>
+                  <a:srgbClr val="4B4F52"/>
+                </a:solidFill>
+                <a:latin typeface="Verdana"/>
+              </a:rPr>
+              <a:t> — jamais « la neige neige ».</a:t>
             </a:r>
           </a:p>
         </p:txBody>
